--- a/viewers/pptx/e2e/fixtures/box-cube-transition.pptx
+++ b/viewers/pptx/e2e/fixtures/box-cube-transition.pptx
@@ -521,7 +521,7 @@
       </p:grpSpPr>
       <p:sp>
         <p:nvSpPr>
-          <p:cNvPr id="3" name="TextBox 3"/>
+          <p:cNvPr id="2" name="TextBox 3"/>
           <p:cNvSpPr txBox="1"/>
           <p:nvPr/>
         </p:nvSpPr>

--- a/viewers/pptx/e2e/fixtures/box-cube-transition.pptx
+++ b/viewers/pptx/e2e/fixtures/box-cube-transition.pptx
@@ -420,12 +420,10 @@
           <a:bodyPr wrap="square"/>
           <a:lstStyle/>
           <a:p>
-            <a:pPr/>
             <a:r>
-              <a:rPr lang="en-US" dirty="0" sz="2400" b="1"/>
+              <a:rPr lang="en-US" sz="2400" b="1" dirty="0"/>
               <a:t>Slide One</a:t>
             </a:r>
-            <a:endParaRPr lang="en-US"/>
           </a:p>
         </p:txBody>
       </p:sp>
@@ -473,12 +471,10 @@
           <a:bodyPr wrap="square"/>
           <a:lstStyle/>
           <a:p>
-            <a:pPr/>
             <a:r>
-              <a:rPr lang="en-US" dirty="0" sz="2400" b="1"/>
+              <a:rPr lang="en-US" sz="2400" b="1" dirty="0"/>
               <a:t>Cube Slide</a:t>
             </a:r>
-            <a:endParaRPr lang="en-US"/>
           </a:p>
         </p:txBody>
       </p:sp>
@@ -538,12 +534,10 @@
           <a:bodyPr wrap="square"/>
           <a:lstStyle/>
           <a:p>
-            <a:pPr/>
             <a:r>
-              <a:rPr lang="en-US" dirty="0" sz="2400" b="1"/>
+              <a:rPr lang="en-US" sz="2400" b="1" dirty="0"/>
               <a:t>Box Slide</a:t>
             </a:r>
-            <a:endParaRPr lang="en-US"/>
           </a:p>
         </p:txBody>
       </p:sp>
